--- a/MacroFiscalModels/Docs/MacroFiscalModels_Pitch_v0_1.pptx
+++ b/MacroFiscalModels/Docs/MacroFiscalModels_Pitch_v0_1.pptx
@@ -117,19 +117,19 @@
   <p:extLst>
     <p:ext uri="{521415D9-36F7-43E2-AB2F-B90AF26B5E84}">
       <p14:sectionLst xmlns:p14="http://schemas.microsoft.com/office/powerpoint/2010/main">
-        <p14:section name="Introduction" id="{b266e9ef-fd03-b1f2-65a2-4c3ad76241e1}">
+        <p14:section name="Introduction" id="{8fdd1440-1d71-e5a3-2434-e8d9cd88c4ce}">
           <p14:sldIdLst>
             <p14:sldId id="256"/>
             <p14:sldId id="257"/>
           </p14:sldIdLst>
         </p14:section>
-        <p14:section name="The toolkit" id="{57eab4a0-7b49-feec-3711-173cf1ef5224}">
+        <p14:section name="The toolkit" id="{2ddd07f2-004a-239e-d23b-6528b712ff0c}">
           <p14:sldIdLst>
             <p14:sldId id="258"/>
             <p14:sldId id="259"/>
           </p14:sldIdLst>
         </p14:section>
-        <p14:section name="Results" id="{2b603449-0366-1d44-112f-af15a024c13f}">
+        <p14:section name="Results" id="{c81c7f2c-a119-b55a-2210-c0bdcde693d2}">
           <p14:sldIdLst>
             <p14:sldId id="260"/>
             <p14:sldId id="261"/>
@@ -137,7 +137,7 @@
             <p14:sldId id="263"/>
           </p14:sldIdLst>
         </p14:section>
-        <p14:section name="Next steps" id="{83fe87f7-eeb2-6678-57d4-280e562f65a0}">
+        <p14:section name="Next steps" id="{b653c726-0438-9b40-db9f-f2dc39bc8290}">
           <p14:sldIdLst>
             <p14:sldId id="264"/>
             <p14:sldId id="265"/>
@@ -356,82 +356,82 @@
                 <c:formatCode>General</c:formatCode>
                 <c:ptCount val="26"/>
                 <c:pt idx="0">
-                  <c:v>0.03</c:v>
+                  <c:v>-0.02</c:v>
                 </c:pt>
                 <c:pt idx="1">
-                  <c:v>0.18</c:v>
+                  <c:v>0.16</c:v>
                 </c:pt>
                 <c:pt idx="2">
-                  <c:v>0.39</c:v>
+                  <c:v>0.35</c:v>
                 </c:pt>
                 <c:pt idx="3">
-                  <c:v>0.62</c:v>
+                  <c:v>0.56</c:v>
                 </c:pt>
                 <c:pt idx="4">
-                  <c:v>0.88</c:v>
+                  <c:v>0.77</c:v>
                 </c:pt>
                 <c:pt idx="5">
-                  <c:v>1.16</c:v>
+                  <c:v>0.99</c:v>
                 </c:pt>
                 <c:pt idx="6">
-                  <c:v>1.38</c:v>
+                  <c:v>1.15</c:v>
                 </c:pt>
                 <c:pt idx="7">
-                  <c:v>1.61</c:v>
+                  <c:v>1.32</c:v>
                 </c:pt>
                 <c:pt idx="8">
-                  <c:v>1.9</c:v>
+                  <c:v>1.54</c:v>
                 </c:pt>
                 <c:pt idx="9">
-                  <c:v>2.19</c:v>
+                  <c:v>1.77</c:v>
                 </c:pt>
                 <c:pt idx="10">
-                  <c:v>2.49</c:v>
+                  <c:v>2</c:v>
                 </c:pt>
                 <c:pt idx="11">
-                  <c:v>2.79</c:v>
+                  <c:v>2.23</c:v>
                 </c:pt>
                 <c:pt idx="12">
-                  <c:v>3.1</c:v>
+                  <c:v>2.48</c:v>
                 </c:pt>
                 <c:pt idx="13">
-                  <c:v>3.4</c:v>
+                  <c:v>2.71</c:v>
                 </c:pt>
                 <c:pt idx="14">
-                  <c:v>3.71</c:v>
+                  <c:v>2.95</c:v>
                 </c:pt>
                 <c:pt idx="15">
-                  <c:v>4.01</c:v>
+                  <c:v>3.19</c:v>
                 </c:pt>
                 <c:pt idx="16">
-                  <c:v>4.3</c:v>
+                  <c:v>3.41</c:v>
                 </c:pt>
                 <c:pt idx="17">
-                  <c:v>4.57</c:v>
+                  <c:v>3.62</c:v>
                 </c:pt>
                 <c:pt idx="18">
+                  <c:v>3.81</c:v>
+                </c:pt>
+                <c:pt idx="19">
+                  <c:v>4</c:v>
+                </c:pt>
+                <c:pt idx="20">
+                  <c:v>4.17</c:v>
+                </c:pt>
+                <c:pt idx="21">
+                  <c:v>4.33</c:v>
+                </c:pt>
+                <c:pt idx="22">
+                  <c:v>4.47</c:v>
+                </c:pt>
+                <c:pt idx="23">
+                  <c:v>4.61</c:v>
+                </c:pt>
+                <c:pt idx="24">
+                  <c:v>4.73</c:v>
+                </c:pt>
+                <c:pt idx="25">
                   <c:v>4.83</c:v>
-                </c:pt>
-                <c:pt idx="19">
-                  <c:v>5.07</c:v>
-                </c:pt>
-                <c:pt idx="20">
-                  <c:v>5.3</c:v>
-                </c:pt>
-                <c:pt idx="21">
-                  <c:v>5.52</c:v>
-                </c:pt>
-                <c:pt idx="22">
-                  <c:v>5.72</c:v>
-                </c:pt>
-                <c:pt idx="23">
-                  <c:v>5.91</c:v>
-                </c:pt>
-                <c:pt idx="24">
-                  <c:v>6.08</c:v>
-                </c:pt>
-                <c:pt idx="25">
-                  <c:v>6.24</c:v>
                 </c:pt>
               </c:numCache>
             </c:numRef>
@@ -602,82 +602,82 @@
                 <c:formatCode>General</c:formatCode>
                 <c:ptCount val="26"/>
                 <c:pt idx="0">
-                  <c:v>0.06</c:v>
+                  <c:v>0.01</c:v>
                 </c:pt>
                 <c:pt idx="1">
-                  <c:v>0.19</c:v>
+                  <c:v>0.18</c:v>
                 </c:pt>
                 <c:pt idx="2">
-                  <c:v>0.4</c:v>
+                  <c:v>0.36</c:v>
                 </c:pt>
                 <c:pt idx="3">
-                  <c:v>0.64</c:v>
+                  <c:v>0.57</c:v>
                 </c:pt>
                 <c:pt idx="4">
-                  <c:v>0.9</c:v>
+                  <c:v>0.78</c:v>
                 </c:pt>
                 <c:pt idx="5">
-                  <c:v>1.18</c:v>
+                  <c:v>1.01</c:v>
                 </c:pt>
                 <c:pt idx="6">
-                  <c:v>1.41</c:v>
+                  <c:v>1.17</c:v>
                 </c:pt>
                 <c:pt idx="7">
-                  <c:v>1.65</c:v>
+                  <c:v>1.35</c:v>
                 </c:pt>
                 <c:pt idx="8">
-                  <c:v>1.94</c:v>
+                  <c:v>1.58</c:v>
                 </c:pt>
                 <c:pt idx="9">
-                  <c:v>2.24</c:v>
+                  <c:v>1.81</c:v>
                 </c:pt>
                 <c:pt idx="10">
-                  <c:v>2.54</c:v>
+                  <c:v>2.05</c:v>
                 </c:pt>
                 <c:pt idx="11">
-                  <c:v>2.86</c:v>
+                  <c:v>2.3</c:v>
                 </c:pt>
                 <c:pt idx="12">
-                  <c:v>3.17</c:v>
+                  <c:v>2.55</c:v>
                 </c:pt>
                 <c:pt idx="13">
-                  <c:v>3.48</c:v>
+                  <c:v>2.79</c:v>
                 </c:pt>
                 <c:pt idx="14">
-                  <c:v>3.79</c:v>
+                  <c:v>3.04</c:v>
                 </c:pt>
                 <c:pt idx="15">
-                  <c:v>4.11</c:v>
+                  <c:v>3.28</c:v>
                 </c:pt>
                 <c:pt idx="16">
-                  <c:v>4.4</c:v>
+                  <c:v>3.51</c:v>
                 </c:pt>
                 <c:pt idx="17">
-                  <c:v>4.67</c:v>
+                  <c:v>3.72</c:v>
                 </c:pt>
                 <c:pt idx="18">
-                  <c:v>4.94</c:v>
+                  <c:v>3.93</c:v>
                 </c:pt>
                 <c:pt idx="19">
-                  <c:v>5.19</c:v>
+                  <c:v>4.12</c:v>
                 </c:pt>
                 <c:pt idx="20">
-                  <c:v>5.43</c:v>
+                  <c:v>4.29</c:v>
                 </c:pt>
                 <c:pt idx="21">
-                  <c:v>5.65</c:v>
+                  <c:v>4.46</c:v>
                 </c:pt>
                 <c:pt idx="22">
-                  <c:v>5.86</c:v>
+                  <c:v>4.61</c:v>
                 </c:pt>
                 <c:pt idx="23">
-                  <c:v>6.05</c:v>
+                  <c:v>4.75</c:v>
                 </c:pt>
                 <c:pt idx="24">
-                  <c:v>6.23</c:v>
+                  <c:v>4.88</c:v>
                 </c:pt>
                 <c:pt idx="25">
-                  <c:v>6.39</c:v>
+                  <c:v>4.99</c:v>
                 </c:pt>
               </c:numCache>
             </c:numRef>
@@ -848,82 +848,82 @@
                 <c:formatCode>General</c:formatCode>
                 <c:ptCount val="26"/>
                 <c:pt idx="0">
-                  <c:v>-0.24</c:v>
+                  <c:v>-0.29</c:v>
                 </c:pt>
                 <c:pt idx="1">
-                  <c:v>0</c:v>
+                  <c:v>-0.02</c:v>
                 </c:pt>
                 <c:pt idx="2">
-                  <c:v>0.15</c:v>
+                  <c:v>0.12</c:v>
                 </c:pt>
                 <c:pt idx="3">
-                  <c:v>0.27</c:v>
+                  <c:v>0.21</c:v>
                 </c:pt>
                 <c:pt idx="4">
+                  <c:v>0.28</c:v>
+                </c:pt>
+                <c:pt idx="5">
+                  <c:v>0.36</c:v>
+                </c:pt>
+                <c:pt idx="6">
+                  <c:v>0.36</c:v>
+                </c:pt>
+                <c:pt idx="7">
+                  <c:v>0.36</c:v>
+                </c:pt>
+                <c:pt idx="8">
                   <c:v>0.4</c:v>
                 </c:pt>
-                <c:pt idx="5">
-                  <c:v>0.53</c:v>
-                </c:pt>
-                <c:pt idx="6">
+                <c:pt idx="9">
+                  <c:v>0.43</c:v>
+                </c:pt>
+                <c:pt idx="10">
+                  <c:v>0.46</c:v>
+                </c:pt>
+                <c:pt idx="11">
+                  <c:v>0.49</c:v>
+                </c:pt>
+                <c:pt idx="12">
+                  <c:v>0.52</c:v>
+                </c:pt>
+                <c:pt idx="13">
+                  <c:v>0.54</c:v>
+                </c:pt>
+                <c:pt idx="14">
+                  <c:v>0.56</c:v>
+                </c:pt>
+                <c:pt idx="15">
                   <c:v>0.59</c:v>
                 </c:pt>
-                <c:pt idx="7">
-                  <c:v>0.65</c:v>
-                </c:pt>
-                <c:pt idx="8">
-                  <c:v>0.76</c:v>
-                </c:pt>
-                <c:pt idx="9">
-                  <c:v>0.85</c:v>
-                </c:pt>
-                <c:pt idx="10">
-                  <c:v>0.95</c:v>
-                </c:pt>
-                <c:pt idx="11">
-                  <c:v>1.04</c:v>
-                </c:pt>
-                <c:pt idx="12">
-                  <c:v>1.13</c:v>
-                </c:pt>
-                <c:pt idx="13">
-                  <c:v>1.21</c:v>
-                </c:pt>
-                <c:pt idx="14">
-                  <c:v>1.3</c:v>
-                </c:pt>
-                <c:pt idx="15">
-                  <c:v>1.39</c:v>
-                </c:pt>
                 <c:pt idx="16">
-                  <c:v>1.46</c:v>
+                  <c:v>0.61</c:v>
                 </c:pt>
                 <c:pt idx="17">
-                  <c:v>1.54</c:v>
+                  <c:v>0.62</c:v>
                 </c:pt>
                 <c:pt idx="18">
-                  <c:v>1.62</c:v>
+                  <c:v>0.64</c:v>
                 </c:pt>
                 <c:pt idx="19">
-                  <c:v>1.7</c:v>
+                  <c:v>0.66</c:v>
                 </c:pt>
                 <c:pt idx="20">
-                  <c:v>1.77</c:v>
+                  <c:v>0.68</c:v>
                 </c:pt>
                 <c:pt idx="21">
-                  <c:v>1.84</c:v>
+                  <c:v>0.7</c:v>
                 </c:pt>
                 <c:pt idx="22">
-                  <c:v>1.91</c:v>
+                  <c:v>0.71</c:v>
                 </c:pt>
                 <c:pt idx="23">
-                  <c:v>1.98</c:v>
+                  <c:v>0.73</c:v>
                 </c:pt>
                 <c:pt idx="24">
-                  <c:v>2.04</c:v>
+                  <c:v>0.74</c:v>
                 </c:pt>
                 <c:pt idx="25">
-                  <c:v>2.1</c:v>
+                  <c:v>0.75</c:v>
                 </c:pt>
               </c:numCache>
             </c:numRef>
@@ -1094,82 +1094,82 @@
                 <c:formatCode>General</c:formatCode>
                 <c:ptCount val="26"/>
                 <c:pt idx="0">
+                  <c:v>-0.06</c:v>
+                </c:pt>
+                <c:pt idx="1">
                   <c:v>-0.01</c:v>
                 </c:pt>
-                <c:pt idx="1">
-                  <c:v>0.01</c:v>
-                </c:pt>
                 <c:pt idx="2">
-                  <c:v>0.05</c:v>
+                  <c:v>0.02</c:v>
                 </c:pt>
                 <c:pt idx="3">
+                  <c:v>0.04</c:v>
+                </c:pt>
+                <c:pt idx="4">
+                  <c:v>0.06</c:v>
+                </c:pt>
+                <c:pt idx="5">
+                  <c:v>0.08</c:v>
+                </c:pt>
+                <c:pt idx="6">
+                  <c:v>0.07</c:v>
+                </c:pt>
+                <c:pt idx="7">
+                  <c:v>0.07</c:v>
+                </c:pt>
+                <c:pt idx="8">
+                  <c:v>0.07</c:v>
+                </c:pt>
+                <c:pt idx="9">
+                  <c:v>0.07</c:v>
+                </c:pt>
+                <c:pt idx="10">
+                  <c:v>0.08</c:v>
+                </c:pt>
+                <c:pt idx="11">
+                  <c:v>0.08</c:v>
+                </c:pt>
+                <c:pt idx="12">
+                  <c:v>0.08</c:v>
+                </c:pt>
+                <c:pt idx="13">
+                  <c:v>0.09</c:v>
+                </c:pt>
+                <c:pt idx="14">
+                  <c:v>0.09</c:v>
+                </c:pt>
+                <c:pt idx="15">
+                  <c:v>0.09</c:v>
+                </c:pt>
+                <c:pt idx="16">
+                  <c:v>0.1</c:v>
+                </c:pt>
+                <c:pt idx="17">
+                  <c:v>0.1</c:v>
+                </c:pt>
+                <c:pt idx="18">
+                  <c:v>0.1</c:v>
+                </c:pt>
+                <c:pt idx="19">
                   <c:v>0.11</c:v>
                 </c:pt>
-                <c:pt idx="4">
-                  <c:v>0.18</c:v>
-                </c:pt>
-                <c:pt idx="5">
-                  <c:v>0.26</c:v>
-                </c:pt>
-                <c:pt idx="6">
-                  <c:v>0.31</c:v>
-                </c:pt>
-                <c:pt idx="7">
-                  <c:v>0.37</c:v>
-                </c:pt>
-                <c:pt idx="8">
-                  <c:v>0.43</c:v>
-                </c:pt>
-                <c:pt idx="9">
-                  <c:v>0.5</c:v>
-                </c:pt>
-                <c:pt idx="10">
-                  <c:v>0.57</c:v>
-                </c:pt>
-                <c:pt idx="11">
-                  <c:v>0.63</c:v>
-                </c:pt>
-                <c:pt idx="12">
-                  <c:v>0.7</c:v>
-                </c:pt>
-                <c:pt idx="13">
-                  <c:v>0.77</c:v>
-                </c:pt>
-                <c:pt idx="14">
-                  <c:v>0.83</c:v>
-                </c:pt>
-                <c:pt idx="15">
-                  <c:v>0.9</c:v>
-                </c:pt>
-                <c:pt idx="16">
-                  <c:v>0.96</c:v>
-                </c:pt>
-                <c:pt idx="17">
-                  <c:v>1.03</c:v>
-                </c:pt>
-                <c:pt idx="18">
-                  <c:v>1.09</c:v>
-                </c:pt>
-                <c:pt idx="19">
-                  <c:v>1.15</c:v>
-                </c:pt>
                 <c:pt idx="20">
-                  <c:v>1.21</c:v>
+                  <c:v>0.11</c:v>
                 </c:pt>
                 <c:pt idx="21">
-                  <c:v>1.26</c:v>
+                  <c:v>0.11</c:v>
                 </c:pt>
                 <c:pt idx="22">
-                  <c:v>1.32</c:v>
+                  <c:v>0.11</c:v>
                 </c:pt>
                 <c:pt idx="23">
-                  <c:v>1.37</c:v>
+                  <c:v>0.12</c:v>
                 </c:pt>
                 <c:pt idx="24">
-                  <c:v>1.42</c:v>
+                  <c:v>0.12</c:v>
                 </c:pt>
                 <c:pt idx="25">
-                  <c:v>1.47</c:v>
+                  <c:v>0.12</c:v>
                 </c:pt>
               </c:numCache>
             </c:numRef>
@@ -3394,7 +3394,7 @@
           <a:p>
             <a:r>
               <a:rPr lang="en-US" dirty="0"/>
-              <a:t>The financing choice moves debt more than GDP: tax financing keeps debt falling with almost the same growth. Without energy savings the gain is about a third as large, so the savings assumption is the one to test first.</a:t>
+              <a:t>The financing choice moves debt more than GDP: tax financing keeps debt falling with almost the same growth. Most of the gain comes from energy savings, so the savings assumption is the one to test first. Most of Kenya's public budget need is land-use and non-CO2 spending, which builds no capital, so the public part alone adds little to GDP.</a:t>
             </a:r>
             <a:endParaRPr lang="en-US" dirty="0"/>
           </a:p>
@@ -9338,7 +9338,7 @@
                 <a:ea typeface="Cambria" pitchFamily="34" charset="-122"/>
                 <a:cs typeface="Cambria" pitchFamily="34" charset="-120"/>
               </a:rPr>
-              <a:t>Kenya's net zero programme could lift GDP about 6% by 2050</a:t>
+              <a:t>Kenya's net zero programme could lift GDP about 5% by 2050</a:t>
             </a:r>
             <a:endParaRPr lang="en-US" sz="3000" dirty="0"/>
           </a:p>
@@ -9425,7 +9425,7 @@
                 <a:ea typeface="Cambria" pitchFamily="34" charset="-122"/>
                 <a:cs typeface="Cambria" pitchFamily="34" charset="-120"/>
               </a:rPr>
-              <a:t>+6.2%</a:t>
+              <a:t>+4.8%</a:t>
             </a:r>
             <a:endParaRPr lang="en-US" sz="3600" dirty="0"/>
           </a:p>
@@ -9532,7 +9532,7 @@
                 <a:ea typeface="Cambria" pitchFamily="34" charset="-122"/>
                 <a:cs typeface="Cambria" pitchFamily="34" charset="-120"/>
               </a:rPr>
-              <a:t>66%</a:t>
+              <a:t>84%</a:t>
             </a:r>
             <a:endParaRPr lang="en-US" sz="3600" dirty="0"/>
           </a:p>
@@ -9639,7 +9639,7 @@
                 <a:ea typeface="Cambria" pitchFamily="34" charset="-122"/>
                 <a:cs typeface="Cambria" pitchFamily="34" charset="-120"/>
               </a:rPr>
-              <a:t>53%</a:t>
+              <a:t>54%</a:t>
             </a:r>
             <a:endParaRPr lang="en-US" sz="3600" dirty="0"/>
           </a:p>
@@ -10792,7 +10792,7 @@
                             <a:schemeClr val="tx2"/>
                           </a:solidFill>
                         </a:rPr>
-                        <a:t>30.2</a:t>
+                        <a:t>30.4</a:t>
                       </a:r>
                       <a:endParaRPr lang="en-US" sz="1300" dirty="0"/>
                     </a:p>
@@ -11160,7 +11160,7 @@
                             <a:schemeClr val="tx2"/>
                           </a:solidFill>
                         </a:rPr>
-                        <a:t>152.5</a:t>
+                        <a:t>153.4</a:t>
                       </a:r>
                       <a:endParaRPr lang="en-US" sz="1300" dirty="0"/>
                     </a:p>
@@ -11221,7 +11221,7 @@
                             <a:schemeClr val="accent2"/>
                           </a:solidFill>
                         </a:rPr>
-                        <a:t>185.6</a:t>
+                        <a:t>186.6</a:t>
                       </a:r>
                       <a:endParaRPr lang="en-US" sz="1300" dirty="0"/>
                     </a:p>
@@ -11528,7 +11528,7 @@
                             <a:schemeClr val="tx2"/>
                           </a:solidFill>
                         </a:rPr>
-                        <a:t>14.3</a:t>
+                        <a:t>14.4</a:t>
                       </a:r>
                       <a:endParaRPr lang="en-US" sz="1300" dirty="0"/>
                     </a:p>
@@ -11589,7 +11589,7 @@
                             <a:schemeClr val="accent2"/>
                           </a:solidFill>
                         </a:rPr>
-                        <a:t>17.4</a:t>
+                        <a:t>17.5</a:t>
                       </a:r>
                       <a:endParaRPr lang="en-US" sz="1300" dirty="0"/>
                     </a:p>
@@ -11896,7 +11896,7 @@
                             <a:schemeClr val="tx2"/>
                           </a:solidFill>
                         </a:rPr>
-                        <a:t>17.7</a:t>
+                        <a:t>17.8</a:t>
                       </a:r>
                       <a:endParaRPr lang="en-US" sz="1300" dirty="0"/>
                     </a:p>
@@ -11957,7 +11957,7 @@
                             <a:schemeClr val="accent2"/>
                           </a:solidFill>
                         </a:rPr>
-                        <a:t>22.1</a:t>
+                        <a:t>22.3</a:t>
                       </a:r>
                       <a:endParaRPr lang="en-US" sz="1300" dirty="0"/>
                     </a:p>
@@ -12264,7 +12264,7 @@
                             <a:schemeClr val="tx2"/>
                           </a:solidFill>
                         </a:rPr>
-                        <a:t>53.4</a:t>
+                        <a:t>53.7</a:t>
                       </a:r>
                       <a:endParaRPr lang="en-US" sz="1300" dirty="0"/>
                     </a:p>
@@ -12325,7 +12325,7 @@
                             <a:schemeClr val="accent2"/>
                           </a:solidFill>
                         </a:rPr>
-                        <a:t>61.3</a:t>
+                        <a:t>61.6</a:t>
                       </a:r>
                       <a:endParaRPr lang="en-US" sz="1300" dirty="0"/>
                     </a:p>
